--- a/Bhagyashree_Lokapure_CampusWasteGuide_Submission.pptx
+++ b/Bhagyashree_Lokapure_CampusWasteGuide_Submission.pptx
@@ -2222,7 +2222,7 @@
                 <a:latin typeface="Calibri"/>
                 <a:ea typeface="Calibri"/>
               </a:rPr>
-              <a:t>Project Files &amp; Demo Links</a:t>
+              <a:t>Project Files &amp; GitHub / Demo Links</a:t>
             </a:r>
           </a:p>
         </p:txBody>
@@ -2372,6 +2372,18 @@
         <p:txBody>
           <a:bodyPr/>
           <a:lstStyle/>
+          <a:p>
+            <a:r>
+              <a:rPr lang="en-US" sz="1600" dirty="0">
+                <a:solidFill>
+                  <a:srgbClr val="FFFFFF"/>
+                </a:solidFill>
+                <a:latin typeface="Courier New"/>
+                <a:ea typeface="Courier New"/>
+              </a:rPr>
+              <a:t>GitHub Repository  : https://github.com/lokapurebhagyashree/CampusWasteGuide</a:t>
+            </a:r>
+          </a:p>
           <a:p>
             <a:r>
               <a:rPr lang="en-US" sz="1600" dirty="0">
